--- a/主页面UI原型.pptx
+++ b/主页面UI原型.pptx
@@ -5735,8 +5735,8 @@
         </p:nvGrpSpPr>
         <p:grpSpPr>
           <a:xfrm>
-            <a:off x="5166360" y="2516505"/>
-            <a:ext cx="4351655" cy="187325"/>
+            <a:off x="4979035" y="2494915"/>
+            <a:ext cx="4244975" cy="187325"/>
             <a:chOff x="1656" y="3277"/>
             <a:chExt cx="7702" cy="368"/>
           </a:xfrm>
@@ -6974,6 +6974,116 @@
                   <a:cs typeface="微软雅黑" panose="020B0503020204020204" charset="-122"/>
                 </a:rPr>
                 <a:t>删除</a:t>
+              </a:r>
+              <a:endParaRPr lang="zh-CN" altLang="en-US" sz="500">
+                <a:solidFill>
+                  <a:schemeClr val="bg1"/>
+                </a:solidFill>
+                <a:latin typeface="微软雅黑" panose="020B0503020204020204" charset="-122"/>
+                <a:ea typeface="微软雅黑" panose="020B0503020204020204" charset="-122"/>
+                <a:cs typeface="微软雅黑" panose="020B0503020204020204" charset="-122"/>
+              </a:endParaRPr>
+            </a:p>
+          </p:txBody>
+        </p:sp>
+      </p:grpSp>
+      <p:grpSp>
+        <p:nvGrpSpPr>
+          <p:cNvPr id="96" name="组合 95"/>
+          <p:cNvGrpSpPr/>
+          <p:nvPr/>
+        </p:nvGrpSpPr>
+        <p:grpSpPr>
+          <a:xfrm>
+            <a:off x="9224963" y="2494915"/>
+            <a:ext cx="319405" cy="168275"/>
+            <a:chOff x="13072" y="5285"/>
+            <a:chExt cx="598" cy="265"/>
+          </a:xfrm>
+        </p:grpSpPr>
+        <p:sp>
+          <p:nvSpPr>
+            <p:cNvPr id="97" name="圆角矩形 96"/>
+            <p:cNvSpPr/>
+            <p:nvPr/>
+          </p:nvSpPr>
+          <p:spPr>
+            <a:xfrm>
+              <a:off x="13097" y="5293"/>
+              <a:ext cx="518" cy="248"/>
+            </a:xfrm>
+            <a:prstGeom prst="roundRect">
+              <a:avLst/>
+            </a:prstGeom>
+            <a:solidFill>
+              <a:schemeClr val="accent1">
+                <a:lumMod val="40000"/>
+                <a:lumOff val="60000"/>
+              </a:schemeClr>
+            </a:solidFill>
+            <a:ln>
+              <a:noFill/>
+            </a:ln>
+          </p:spPr>
+          <p:style>
+            <a:lnRef idx="2">
+              <a:schemeClr val="accent1">
+                <a:lumMod val="75000"/>
+              </a:schemeClr>
+            </a:lnRef>
+            <a:fillRef idx="1">
+              <a:schemeClr val="accent1"/>
+            </a:fillRef>
+            <a:effectRef idx="0">
+              <a:srgbClr val="FFFFFF"/>
+            </a:effectRef>
+            <a:fontRef idx="minor">
+              <a:schemeClr val="lt1"/>
+            </a:fontRef>
+          </p:style>
+          <p:txBody>
+            <a:bodyPr rtlCol="0" anchor="ctr"/>
+            <a:p>
+              <a:pPr algn="ctr"/>
+              <a:endParaRPr lang="en-US" altLang="zh-CN" sz="600">
+                <a:latin typeface="微软雅黑" panose="020B0503020204020204" charset="-122"/>
+                <a:ea typeface="微软雅黑" panose="020B0503020204020204" charset="-122"/>
+                <a:cs typeface="微软雅黑" panose="020B0503020204020204" charset="-122"/>
+              </a:endParaRPr>
+            </a:p>
+          </p:txBody>
+        </p:sp>
+        <p:sp>
+          <p:nvSpPr>
+            <p:cNvPr id="98" name="文本框 97"/>
+            <p:cNvSpPr txBox="1"/>
+            <p:nvPr/>
+          </p:nvSpPr>
+          <p:spPr>
+            <a:xfrm>
+              <a:off x="13072" y="5285"/>
+              <a:ext cx="598" cy="265"/>
+            </a:xfrm>
+            <a:prstGeom prst="rect">
+              <a:avLst/>
+            </a:prstGeom>
+            <a:noFill/>
+          </p:spPr>
+          <p:txBody>
+            <a:bodyPr wrap="square" rtlCol="0">
+              <a:spAutoFit/>
+            </a:bodyPr>
+            <a:p>
+              <a:r>
+                <a:rPr lang="zh-CN" altLang="en-US" sz="500">
+                  <a:solidFill>
+                    <a:schemeClr val="bg1"/>
+                  </a:solidFill>
+                  <a:latin typeface="微软雅黑" panose="020B0503020204020204" charset="-122"/>
+                  <a:ea typeface="微软雅黑" panose="020B0503020204020204" charset="-122"/>
+                  <a:cs typeface="微软雅黑" panose="020B0503020204020204" charset="-122"/>
+                </a:rPr>
+                <a:t>重置</a:t>
               </a:r>
               <a:endParaRPr lang="zh-CN" altLang="en-US" sz="500">
                 <a:solidFill>
